--- a/curso/pptx/S38.pptx
+++ b/curso/pptx/S38.pptx
@@ -7102,7 +7102,7 @@
                 </a:solidFill>
                 <a:latin typeface="Nunito Sans"/>
               </a:rPr>
-              <a:t>Eje cortado:</a:t>
+              <a:t>被截断的坐标轴：</a:t>
             </a:r>
             <a:r>
               <a:rPr sz="2800" b="0">
@@ -7111,7 +7111,7 @@
                 </a:solidFill>
                 <a:latin typeface="Nunito Sans"/>
               </a:rPr>
-              <a:t> empieza en otro número, por ejemplo en 90</a:t>
+              <a:t>从别的数字开始，例如从90开始</a:t>
             </a:r>
           </a:p>
           <a:p>
@@ -7136,7 +7136,7 @@
                 </a:solidFill>
                 <a:latin typeface="Nunito Sans"/>
               </a:rPr>
-              <a:t>Así, en las barras, diferencias pequeñas parecen enormes</a:t>
+              <a:t>这样，在柱子上，很小的差别也会显得很大</a:t>
             </a:r>
           </a:p>
           <a:p>
@@ -7161,7 +7161,7 @@
                 </a:solidFill>
                 <a:latin typeface="Nunito Sans"/>
               </a:rPr>
-              <a:t>Mira siempre dónde empieza el eje</a:t>
+              <a:t>一定要看坐标轴从哪里开始</a:t>
             </a:r>
           </a:p>
         </p:txBody>
@@ -7716,7 +7716,7 @@
                 </a:solidFill>
                 <a:latin typeface="Nunito Sans"/>
               </a:rPr>
-              <a:t>Escala estirada o aplastada:</a:t>
+              <a:t>被拉长或压扁的刻度：</a:t>
             </a:r>
             <a:r>
               <a:rPr sz="2800" b="0">
@@ -7725,7 +7725,7 @@
                 </a:solidFill>
                 <a:latin typeface="Nunito Sans"/>
               </a:rPr>
-              <a:t> la misma subida parece un muro o una llanura</a:t>
+              <a:t>同样的上升，看起来像一堵墙，或者像一片平地</a:t>
             </a:r>
           </a:p>
           <a:p>
@@ -7750,7 +7750,7 @@
                 </a:solidFill>
                 <a:latin typeface="Nunito Sans"/>
               </a:rPr>
-              <a:t>Dibujos que crecen en ancho y alto:</a:t>
+              <a:t>宽和高一起变大的图案：</a:t>
             </a:r>
             <a:r>
               <a:rPr sz="2800" b="0">
@@ -7759,7 +7759,7 @@
                 </a:solidFill>
                 <a:latin typeface="Nunito Sans"/>
               </a:rPr>
-              <a:t> el doble parece cuatro veces más</a:t>
+              <a:t>两倍看起来像四倍</a:t>
             </a:r>
           </a:p>
           <a:p>
@@ -7784,7 +7784,7 @@
                 </a:solidFill>
                 <a:latin typeface="Nunito Sans"/>
               </a:rPr>
-              <a:t>Colores:</a:t>
+              <a:t>颜色：</a:t>
             </a:r>
             <a:r>
               <a:rPr sz="2800" b="0">
@@ -7793,7 +7793,7 @@
                 </a:solidFill>
                 <a:latin typeface="Nunito Sans"/>
               </a:rPr>
-              <a:t> el rojo asusta aunque el dato sea pequeño</a:t>
+              <a:t>即使数据很小，红色也会让人害怕</a:t>
             </a:r>
           </a:p>
           <a:p>
@@ -7818,7 +7818,7 @@
                 </a:solidFill>
                 <a:latin typeface="Nunito Sans"/>
               </a:rPr>
-              <a:t>Recortar fechas:</a:t>
+              <a:t>剪掉日期：</a:t>
             </a:r>
             <a:r>
               <a:rPr sz="2800" b="0">
@@ -7827,7 +7827,7 @@
                 </a:solidFill>
                 <a:latin typeface="Nunito Sans"/>
               </a:rPr>
-              <a:t> enseñar solo los meses que convienen</a:t>
+              <a:t>只展示对自己有利的那几个月</a:t>
             </a:r>
           </a:p>
         </p:txBody>
@@ -7979,7 +7979,7 @@
                 </a:solidFill>
                 <a:latin typeface="Nunito Sans"/>
               </a:rPr>
-              <a:t>¿Dónde empieza el eje?</a:t>
+              <a:t>坐标轴从哪里开始？</a:t>
             </a:r>
           </a:p>
           <a:p>
@@ -8004,7 +8004,7 @@
                 </a:solidFill>
                 <a:latin typeface="Nunito Sans"/>
               </a:rPr>
-              <a:t>¿Qué fechas o datos faltan?</a:t>
+              <a:t>缺少了哪些日期或数据？</a:t>
             </a:r>
           </a:p>
           <a:p>
@@ -8029,7 +8029,7 @@
                 </a:solidFill>
                 <a:latin typeface="Nunito Sans"/>
               </a:rPr>
-              <a:t>¿Qué dicen los números, no el dibujo?</a:t>
+              <a:t>数字说了什么，而不是图案？</a:t>
             </a:r>
           </a:p>
           <a:p>
@@ -8054,7 +8054,7 @@
                 </a:solidFill>
                 <a:latin typeface="Nunito Sans"/>
               </a:rPr>
-              <a:t>¿Quién ha hecho el gráfico y qué gana? （第31课）</a:t>
+              <a:t>这张图表是谁做的？他能得到什么好处？（第31课）</a:t>
             </a:r>
           </a:p>
         </p:txBody>

--- a/curso/pptx/S38.pptx
+++ b/curso/pptx/S38.pptx
@@ -7374,7 +7374,7 @@
                           </a:solidFill>
                           <a:latin typeface="Nunito Sans"/>
                         </a:rPr>
-                        <a:t>Aitor：92分</a:t>
+                        <a:t>一个男孩：92分</a:t>
                       </a:r>
                     </a:p>
                   </a:txBody>
@@ -7442,7 +7442,7 @@
                           </a:solidFill>
                           <a:latin typeface="Nunito Sans"/>
                         </a:rPr>
-                        <a:t>Chen：98分</a:t>
+                        <a:t>一个同学：98分</a:t>
                       </a:r>
                     </a:p>
                   </a:txBody>
@@ -7554,7 +7554,7 @@
                           </a:solidFill>
                           <a:latin typeface="Nunito Sans"/>
                         </a:rPr>
-                        <a:t>Chen是他的四倍！</a:t>
+                        <a:t>这个同学是他的四倍！</a:t>
                       </a:r>
                     </a:p>
                   </a:txBody>
